--- a/bakeoff/outputs/software-baseline.pptx
+++ b/bakeoff/outputs/software-baseline.pptx
@@ -13597,11 +13597,11 @@
             <a:tbl>
               <a:tblPr/>
               <a:tblGrid>
-                <a:gridCol w="2286000"/>
+                <a:gridCol w="2011680"/>
                 <a:gridCol w="896112"/>
                 <a:gridCol w="768096"/>
                 <a:gridCol w="896112"/>
-                <a:gridCol w="3877056"/>
+                <a:gridCol w="4151376"/>
               </a:tblGrid>
               <a:tr h="245059">
                 <a:tc>
@@ -17424,7 +17424,7 @@
               <a:buNone/>
             </a:pPr>
             <a:r>
-              <a:rPr lang="en-US" sz="900" dirty="0">
+              <a:rPr lang="en-US" sz="1100" dirty="0">
                 <a:solidFill>
                   <a:srgbClr val="0D1B2A"/>
                 </a:solidFill>
@@ -17434,7 +17434,7 @@
               </a:rPr>
               <a:t>Key Grafana Dashboards:  Service Overview (RED per service)  ·  Kafka Health (consumer lag, broker disk, replication)  ·  Checkout Saga (success %, avg duration, failure by step)  ·  Deploy Tracker (last deploy, canary %, rollback count)</a:t>
             </a:r>
-            <a:endParaRPr lang="en-US" sz="900" dirty="0"/>
+            <a:endParaRPr lang="en-US" sz="1100" dirty="0"/>
           </a:p>
         </p:txBody>
       </p:sp>
